--- a/Lecture04_ProviderPayment/L4Slides_ProviderPayment.pptx
+++ b/Lecture04_ProviderPayment/L4Slides_ProviderPayment.pptx
@@ -276,7 +276,7 @@
           <a:p>
             <a:fld id="{EF911157-0FC2-4F06-8D61-FD647FE4E19D}" type="datetimeFigureOut">
               <a:rPr lang="en-US" smtClean="0"/>
-              <a:t>1/15/2026</a:t>
+              <a:t>2/2/2026</a:t>
             </a:fld>
             <a:endParaRPr lang="en-US"/>
           </a:p>
@@ -3744,6 +3744,12 @@
           <a:bodyPr/>
           <a:lstStyle/>
           <a:p>
+            <a:r>
+              <a:rPr lang="en-US" dirty="0"/>
+              <a:t>This is *more* than in the US</a:t>
+            </a:r>
+          </a:p>
+          <a:p>
             <a:endParaRPr lang="en-US" dirty="0"/>
           </a:p>
         </p:txBody>
@@ -6847,7 +6853,7 @@
             <a:fld id="{0972D05C-DCFB-4BB6-B49C-AC126BF3ED2C}" type="datetimeFigureOut">
               <a:rPr lang="en-US" smtClean="0"/>
               <a:pPr/>
-              <a:t>1/15/2026</a:t>
+              <a:t>2/2/2026</a:t>
             </a:fld>
             <a:endParaRPr lang="en-US"/>
           </a:p>
@@ -7084,7 +7090,7 @@
             <a:fld id="{0972D05C-DCFB-4BB6-B49C-AC126BF3ED2C}" type="datetimeFigureOut">
               <a:rPr lang="en-US" smtClean="0"/>
               <a:pPr/>
-              <a:t>1/15/2026</a:t>
+              <a:t>2/2/2026</a:t>
             </a:fld>
             <a:endParaRPr lang="en-US"/>
           </a:p>
@@ -7266,7 +7272,7 @@
             <a:fld id="{0972D05C-DCFB-4BB6-B49C-AC126BF3ED2C}" type="datetimeFigureOut">
               <a:rPr lang="en-US" smtClean="0"/>
               <a:pPr/>
-              <a:t>1/15/2026</a:t>
+              <a:t>2/2/2026</a:t>
             </a:fld>
             <a:endParaRPr lang="en-US"/>
           </a:p>
@@ -7713,7 +7719,7 @@
             <a:fld id="{0972D05C-DCFB-4BB6-B49C-AC126BF3ED2C}" type="datetimeFigureOut">
               <a:rPr lang="en-US" smtClean="0"/>
               <a:pPr/>
-              <a:t>1/15/2026</a:t>
+              <a:t>2/2/2026</a:t>
             </a:fld>
             <a:endParaRPr lang="en-US"/>
           </a:p>
@@ -7969,7 +7975,7 @@
             <a:fld id="{0972D05C-DCFB-4BB6-B49C-AC126BF3ED2C}" type="datetimeFigureOut">
               <a:rPr lang="en-US" smtClean="0"/>
               <a:pPr/>
-              <a:t>1/15/2026</a:t>
+              <a:t>2/2/2026</a:t>
             </a:fld>
             <a:endParaRPr lang="en-US"/>
           </a:p>
@@ -8297,7 +8303,7 @@
             <a:fld id="{0972D05C-DCFB-4BB6-B49C-AC126BF3ED2C}" type="datetimeFigureOut">
               <a:rPr lang="en-US" smtClean="0"/>
               <a:pPr/>
-              <a:t>1/15/2026</a:t>
+              <a:t>2/2/2026</a:t>
             </a:fld>
             <a:endParaRPr lang="en-US"/>
           </a:p>
@@ -8750,7 +8756,7 @@
             <a:fld id="{0972D05C-DCFB-4BB6-B49C-AC126BF3ED2C}" type="datetimeFigureOut">
               <a:rPr lang="en-US" smtClean="0"/>
               <a:pPr/>
-              <a:t>1/15/2026</a:t>
+              <a:t>2/2/2026</a:t>
             </a:fld>
             <a:endParaRPr lang="en-US"/>
           </a:p>
@@ -8870,7 +8876,7 @@
             <a:fld id="{0972D05C-DCFB-4BB6-B49C-AC126BF3ED2C}" type="datetimeFigureOut">
               <a:rPr lang="en-US" smtClean="0"/>
               <a:pPr/>
-              <a:t>1/15/2026</a:t>
+              <a:t>2/2/2026</a:t>
             </a:fld>
             <a:endParaRPr lang="en-US"/>
           </a:p>
@@ -8967,7 +8973,7 @@
             <a:fld id="{0972D05C-DCFB-4BB6-B49C-AC126BF3ED2C}" type="datetimeFigureOut">
               <a:rPr lang="en-US" smtClean="0"/>
               <a:pPr/>
-              <a:t>1/15/2026</a:t>
+              <a:t>2/2/2026</a:t>
             </a:fld>
             <a:endParaRPr lang="en-US"/>
           </a:p>
@@ -9256,7 +9262,7 @@
             <a:fld id="{0972D05C-DCFB-4BB6-B49C-AC126BF3ED2C}" type="datetimeFigureOut">
               <a:rPr lang="en-US" smtClean="0"/>
               <a:pPr/>
-              <a:t>1/15/2026</a:t>
+              <a:t>2/2/2026</a:t>
             </a:fld>
             <a:endParaRPr lang="en-US"/>
           </a:p>
@@ -9580,7 +9586,7 @@
             <a:fld id="{0972D05C-DCFB-4BB6-B49C-AC126BF3ED2C}" type="datetimeFigureOut">
               <a:rPr lang="en-US" smtClean="0"/>
               <a:pPr/>
-              <a:t>1/15/2026</a:t>
+              <a:t>2/2/2026</a:t>
             </a:fld>
             <a:endParaRPr lang="en-US"/>
           </a:p>
@@ -9842,7 +9848,7 @@
             <a:fld id="{0972D05C-DCFB-4BB6-B49C-AC126BF3ED2C}" type="datetimeFigureOut">
               <a:rPr lang="en-US" smtClean="0"/>
               <a:pPr/>
-              <a:t>1/15/2026</a:t>
+              <a:t>2/2/2026</a:t>
             </a:fld>
             <a:endParaRPr lang="en-US" dirty="0"/>
           </a:p>
@@ -10507,7 +10513,7 @@
         <p:spPr>
           <a:xfrm>
             <a:off x="533400" y="1025953"/>
-            <a:ext cx="10080321" cy="2403047"/>
+            <a:ext cx="10080321" cy="2885551"/>
           </a:xfrm>
           <a:prstGeom prst="rect">
             <a:avLst/>
@@ -10660,6 +10666,57 @@
                 <a:cs typeface="Times New Roman" panose="02020603050405020304" pitchFamily="18" charset="0"/>
               </a:rPr>
               <a:t>a well-functioning healthcare sector, they also keep physician wages high (not unique to physicians)</a:t>
+            </a:r>
+            <a:endParaRPr lang="en-CA" sz="2200" dirty="0">
+              <a:solidFill>
+                <a:srgbClr val="22373A"/>
+              </a:solidFill>
+              <a:latin typeface="Times New Roman" panose="02020603050405020304" pitchFamily="18" charset="0"/>
+              <a:cs typeface="Times New Roman" panose="02020603050405020304" pitchFamily="18" charset="0"/>
+            </a:endParaRPr>
+          </a:p>
+          <a:p>
+            <a:pPr marL="216074" marR="10737" indent="-190574">
+              <a:lnSpc>
+                <a:spcPct val="116199"/>
+              </a:lnSpc>
+              <a:spcBef>
+                <a:spcPts val="666"/>
+              </a:spcBef>
+              <a:buChar char="•"/>
+              <a:tabLst>
+                <a:tab pos="217416" algn="l"/>
+              </a:tabLst>
+            </a:pPr>
+            <a:r>
+              <a:rPr lang="en-CA" sz="2200" dirty="0">
+                <a:solidFill>
+                  <a:srgbClr val="22373A"/>
+                </a:solidFill>
+                <a:latin typeface="Times New Roman" panose="02020603050405020304" pitchFamily="18" charset="0"/>
+                <a:cs typeface="Times New Roman" panose="02020603050405020304" pitchFamily="18" charset="0"/>
+              </a:rPr>
+              <a:t>Think about recent expansions of </a:t>
+            </a:r>
+            <a:r>
+              <a:rPr lang="en-CA" sz="2200" b="1" dirty="0">
+                <a:solidFill>
+                  <a:srgbClr val="22373A"/>
+                </a:solidFill>
+                <a:latin typeface="Times New Roman" panose="02020603050405020304" pitchFamily="18" charset="0"/>
+                <a:cs typeface="Times New Roman" panose="02020603050405020304" pitchFamily="18" charset="0"/>
+              </a:rPr>
+              <a:t>scope of practice </a:t>
+            </a:r>
+            <a:r>
+              <a:rPr lang="en-CA" sz="2200" dirty="0">
+                <a:solidFill>
+                  <a:srgbClr val="22373A"/>
+                </a:solidFill>
+                <a:latin typeface="Times New Roman" panose="02020603050405020304" pitchFamily="18" charset="0"/>
+                <a:cs typeface="Times New Roman" panose="02020603050405020304" pitchFamily="18" charset="0"/>
+              </a:rPr>
+              <a:t>(dental therapists, pharmacists)</a:t>
             </a:r>
             <a:endParaRPr sz="2200" dirty="0">
               <a:latin typeface="Times New Roman" panose="02020603050405020304" pitchFamily="18" charset="0"/>
